--- a/resources/presentations/Lunch-Is-Packed-Module-07-set-up-and-practise.pptx
+++ b/resources/presentations/Lunch-Is-Packed-Module-07-set-up-and-practise.pptx
@@ -2,20 +2,20 @@
 <file path=ppt/presentation.xml><?xml version="1.0" encoding="utf-8"?>
 <p:presentation xmlns:p="http://schemas.openxmlformats.org/presentationml/2006/main">
   <p:sldMasterIdLst>
-    <p:sldMasterId xmlns:r="http://schemas.openxmlformats.org/officeDocument/2006/relationships" id="2147483648" r:id="R6e4bb144f7604306"/>
+    <p:sldMasterId xmlns:r="http://schemas.openxmlformats.org/officeDocument/2006/relationships" id="2147483648" r:id="Rf6cc417ec80949e5"/>
   </p:sldMasterIdLst>
   <p:notesMasterIdLst>
-    <p:notesMasterId xmlns:r="http://schemas.openxmlformats.org/officeDocument/2006/relationships" r:id="R7a12f9980cac4672"/>
+    <p:notesMasterId xmlns:r="http://schemas.openxmlformats.org/officeDocument/2006/relationships" r:id="Ra894f2ae29034d72"/>
   </p:notesMasterIdLst>
   <p:sldIdLst>
-    <p:sldId xmlns:r="http://schemas.openxmlformats.org/officeDocument/2006/relationships" id="256" r:id="Ra38f04b4abeb4d66"/>
-    <p:sldId xmlns:r="http://schemas.openxmlformats.org/officeDocument/2006/relationships" id="257" r:id="R32a1727094f24c1f"/>
-    <p:sldId xmlns:r="http://schemas.openxmlformats.org/officeDocument/2006/relationships" id="258" r:id="R74f4322760704d37"/>
-    <p:sldId xmlns:r="http://schemas.openxmlformats.org/officeDocument/2006/relationships" id="259" r:id="R00267a8de9d7420d"/>
-    <p:sldId xmlns:r="http://schemas.openxmlformats.org/officeDocument/2006/relationships" id="260" r:id="R1eba9752042d44bb"/>
-    <p:sldId xmlns:r="http://schemas.openxmlformats.org/officeDocument/2006/relationships" id="261" r:id="R43edc9e56bab47aa"/>
-    <p:sldId xmlns:r="http://schemas.openxmlformats.org/officeDocument/2006/relationships" id="262" r:id="R209725e8753b4c53"/>
-    <p:sldId xmlns:r="http://schemas.openxmlformats.org/officeDocument/2006/relationships" id="263" r:id="Rc31e727463ee4f65"/>
+    <p:sldId xmlns:r="http://schemas.openxmlformats.org/officeDocument/2006/relationships" id="256" r:id="Rb7bde91a05ad479f"/>
+    <p:sldId xmlns:r="http://schemas.openxmlformats.org/officeDocument/2006/relationships" id="257" r:id="Rf54363626794422c"/>
+    <p:sldId xmlns:r="http://schemas.openxmlformats.org/officeDocument/2006/relationships" id="258" r:id="Rff2cb69c280e4513"/>
+    <p:sldId xmlns:r="http://schemas.openxmlformats.org/officeDocument/2006/relationships" id="259" r:id="Ra32f8ffaa6ae46a0"/>
+    <p:sldId xmlns:r="http://schemas.openxmlformats.org/officeDocument/2006/relationships" id="260" r:id="Rcb959dd39e1148f2"/>
+    <p:sldId xmlns:r="http://schemas.openxmlformats.org/officeDocument/2006/relationships" id="261" r:id="R5ccfe6e022a54080"/>
+    <p:sldId xmlns:r="http://schemas.openxmlformats.org/officeDocument/2006/relationships" id="262" r:id="R5bd384a66ff44964"/>
+    <p:sldId xmlns:r="http://schemas.openxmlformats.org/officeDocument/2006/relationships" id="263" r:id="R87431cbbdd2a404d"/>
   </p:sldIdLst>
   <p:sldSz cx="12192000" cy="6858000"/>
   <p:notesSz cx="6858000" cy="9144000"/>
@@ -1127,7 +1127,7 @@
   </p:cSld>
   <p:clrMap bg1="lt1" tx1="dk1" bg2="lt2" tx2="dk2" accent1="accent1" accent2="accent2" accent3="accent3" accent4="accent4" accent5="accent5" accent6="accent6" hlink="hlink" folHlink="folHlink"/>
   <p:sldLayoutIdLst>
-    <p:sldLayoutId xmlns:r="http://schemas.openxmlformats.org/officeDocument/2006/relationships" id="2147483649" r:id="R7f38f15033c74625"/>
+    <p:sldLayoutId xmlns:r="http://schemas.openxmlformats.org/officeDocument/2006/relationships" id="2147483649" r:id="Rdd602b4368c743ac"/>
   </p:sldLayoutIdLst>
   <p:txStyles>
     <p:titleStyle>
@@ -1678,7 +1678,7 @@
           <p:cNvPr id="7" name="title-plane">
             <a:extLst xmlns:a="http://schemas.openxmlformats.org/drawingml/2006/main">
               <a:ext uri="{FF2B5EF4-FFF2-40B4-BE49-F238E27FC236}">
-                <a16:creationId xmlns:a16="http://schemas.microsoft.com/office/drawing/2014/main" id="{D820C53C-892B-4F5A-B7D0-DA91E8AECD6B}"/>
+                <a16:creationId xmlns:a16="http://schemas.microsoft.com/office/drawing/2014/main" id="{EC0C4C83-1551-48D0-9F22-2036E0EDF934}"/>
               </a:ext>
             </a:extLst>
           </p:cNvPr>
@@ -1713,8 +1713,8 @@
           <p:nvPr/>
         </p:nvPicPr>
         <p:blipFill>
-          <a:blip xmlns:r="http://schemas.openxmlformats.org/officeDocument/2006/relationships" xmlns:a="http://schemas.openxmlformats.org/drawingml/2006/main" r:embed="R3d508e3b49d74760"/>
-          <a:srcRect xmlns:a="http://schemas.openxmlformats.org/drawingml/2006/main" l="30134" t="0" r="30134" b="0"/>
+          <a:blip xmlns:r="http://schemas.openxmlformats.org/officeDocument/2006/relationships" xmlns:a="http://schemas.openxmlformats.org/drawingml/2006/main" r:embed="Rf9ac55b6f3dc4a64"/>
+          <a:srcRect xmlns:a="http://schemas.openxmlformats.org/drawingml/2006/main" l="24074" t="0" r="24074" b="0"/>
           <a:stretch xmlns:a="http://schemas.openxmlformats.org/drawingml/2006/main">
             <a:fillRect l="0" t="0" r="0" b="0"/>
           </a:stretch>
@@ -1734,7 +1734,7 @@
           <p:cNvPr id="3" name="module-kicker">
             <a:extLst xmlns:a="http://schemas.openxmlformats.org/drawingml/2006/main">
               <a:ext uri="{FF2B5EF4-FFF2-40B4-BE49-F238E27FC236}">
-                <a16:creationId xmlns:a16="http://schemas.microsoft.com/office/drawing/2014/main" id="{36A66ED3-259E-4820-A458-245076FCE2C8}"/>
+                <a16:creationId xmlns:a16="http://schemas.microsoft.com/office/drawing/2014/main" id="{4388492B-AB7A-43DC-A1DB-B06A1355D369}"/>
               </a:ext>
             </a:extLst>
           </p:cNvPr>
@@ -1784,7 +1784,7 @@
           <p:cNvPr id="4" name="deck-title">
             <a:extLst xmlns:a="http://schemas.openxmlformats.org/drawingml/2006/main">
               <a:ext uri="{FF2B5EF4-FFF2-40B4-BE49-F238E27FC236}">
-                <a16:creationId xmlns:a16="http://schemas.microsoft.com/office/drawing/2014/main" id="{FFA62700-9CEC-4784-87A1-E1120201A7E1}"/>
+                <a16:creationId xmlns:a16="http://schemas.microsoft.com/office/drawing/2014/main" id="{86A5B836-194B-43E8-AAAD-F0074C76C8B8}"/>
               </a:ext>
             </a:extLst>
           </p:cNvPr>
@@ -1834,7 +1834,7 @@
           <p:cNvPr id="5" name="deck-subtitle">
             <a:extLst xmlns:a="http://schemas.openxmlformats.org/drawingml/2006/main">
               <a:ext uri="{FF2B5EF4-FFF2-40B4-BE49-F238E27FC236}">
-                <a16:creationId xmlns:a16="http://schemas.microsoft.com/office/drawing/2014/main" id="{D65BEFF4-2ED4-4C2C-B7EE-8F65DE444C70}"/>
+                <a16:creationId xmlns:a16="http://schemas.microsoft.com/office/drawing/2014/main" id="{19BDB25C-1D98-4812-BB7F-E0A497EB75FF}"/>
               </a:ext>
             </a:extLst>
           </p:cNvPr>
@@ -1884,7 +1884,7 @@
           <p:cNvPr id="6" name="deck-footer">
             <a:extLst xmlns:a="http://schemas.openxmlformats.org/drawingml/2006/main">
               <a:ext uri="{FF2B5EF4-FFF2-40B4-BE49-F238E27FC236}">
-                <a16:creationId xmlns:a16="http://schemas.microsoft.com/office/drawing/2014/main" id="{2CB6B507-D14C-402A-BA29-D6D0483656F7}"/>
+                <a16:creationId xmlns:a16="http://schemas.microsoft.com/office/drawing/2014/main" id="{0372426B-BDFB-4D35-AADA-F1AAB06BC64F}"/>
               </a:ext>
             </a:extLst>
           </p:cNvPr>
@@ -1932,7 +1932,7 @@
     </p:spTree>
     <p:extLst>
       <p:ext uri="{BB962C8B-B14F-4D97-AF65-F5344CB8AC3E}">
-        <p14:creationId xmlns:p14="http://schemas.microsoft.com/office/powerpoint/2010/main" val="13398600"/>
+        <p14:creationId xmlns:p14="http://schemas.microsoft.com/office/powerpoint/2010/main" val="375501496"/>
       </p:ext>
     </p:extLst>
   </p:cSld>
@@ -1963,7 +1963,7 @@
           <p:cNvPr id="15" name="top-rule">
             <a:extLst xmlns:a="http://schemas.openxmlformats.org/drawingml/2006/main">
               <a:ext uri="{FF2B5EF4-FFF2-40B4-BE49-F238E27FC236}">
-                <a16:creationId xmlns:a16="http://schemas.microsoft.com/office/drawing/2014/main" id="{AF897018-33C9-47FE-886C-D4D0B54BDC68}"/>
+                <a16:creationId xmlns:a16="http://schemas.microsoft.com/office/drawing/2014/main" id="{5B534F04-8303-4B19-B191-00D6FE0655C0}"/>
               </a:ext>
             </a:extLst>
           </p:cNvPr>
@@ -1994,7 +1994,7 @@
           <p:cNvPr id="2" name="course-label">
             <a:extLst xmlns:a="http://schemas.openxmlformats.org/drawingml/2006/main">
               <a:ext uri="{FF2B5EF4-FFF2-40B4-BE49-F238E27FC236}">
-                <a16:creationId xmlns:a16="http://schemas.microsoft.com/office/drawing/2014/main" id="{1933BD79-9C97-4E44-A108-160096C8E7AE}"/>
+                <a16:creationId xmlns:a16="http://schemas.microsoft.com/office/drawing/2014/main" id="{985B1FB5-E90E-4BB4-9B3F-4DE112F65811}"/>
               </a:ext>
             </a:extLst>
           </p:cNvPr>
@@ -2044,7 +2044,7 @@
           <p:cNvPr id="3" name="module-label">
             <a:extLst xmlns:a="http://schemas.openxmlformats.org/drawingml/2006/main">
               <a:ext uri="{FF2B5EF4-FFF2-40B4-BE49-F238E27FC236}">
-                <a16:creationId xmlns:a16="http://schemas.microsoft.com/office/drawing/2014/main" id="{7AC37CC6-012A-4860-80EA-A141024BF95F}"/>
+                <a16:creationId xmlns:a16="http://schemas.microsoft.com/office/drawing/2014/main" id="{D1588409-56D5-4BEA-82FE-CCDD02FEFC34}"/>
               </a:ext>
             </a:extLst>
           </p:cNvPr>
@@ -2094,7 +2094,7 @@
           <p:cNvPr id="4" name="slide-title">
             <a:extLst xmlns:a="http://schemas.openxmlformats.org/drawingml/2006/main">
               <a:ext uri="{FF2B5EF4-FFF2-40B4-BE49-F238E27FC236}">
-                <a16:creationId xmlns:a16="http://schemas.microsoft.com/office/drawing/2014/main" id="{E66A0313-47D0-4761-929D-A71CE2ED756C}"/>
+                <a16:creationId xmlns:a16="http://schemas.microsoft.com/office/drawing/2014/main" id="{D6A44836-12EB-4BF0-84CF-AE175A303357}"/>
               </a:ext>
             </a:extLst>
           </p:cNvPr>
@@ -2144,7 +2144,7 @@
           <p:cNvPr id="5" name="slide-subtitle">
             <a:extLst xmlns:a="http://schemas.openxmlformats.org/drawingml/2006/main">
               <a:ext uri="{FF2B5EF4-FFF2-40B4-BE49-F238E27FC236}">
-                <a16:creationId xmlns:a16="http://schemas.microsoft.com/office/drawing/2014/main" id="{3CC706D2-E9EB-484A-943E-8BCC5301D1B7}"/>
+                <a16:creationId xmlns:a16="http://schemas.microsoft.com/office/drawing/2014/main" id="{70A50040-9B21-4566-B3CB-B53CFBBB4883}"/>
               </a:ext>
             </a:extLst>
           </p:cNvPr>
@@ -2194,7 +2194,7 @@
           <p:cNvPr id="6" name="bullet-1">
             <a:extLst xmlns:a="http://schemas.openxmlformats.org/drawingml/2006/main">
               <a:ext uri="{FF2B5EF4-FFF2-40B4-BE49-F238E27FC236}">
-                <a16:creationId xmlns:a16="http://schemas.microsoft.com/office/drawing/2014/main" id="{D14BFEF2-7B2B-4303-B8BF-50E203AF6126}"/>
+                <a16:creationId xmlns:a16="http://schemas.microsoft.com/office/drawing/2014/main" id="{E35785C9-66CA-4BFD-B6BF-A345B14DEA41}"/>
               </a:ext>
             </a:extLst>
           </p:cNvPr>
@@ -2225,7 +2225,7 @@
           <p:cNvPr id="7" name="bullet-number-1">
             <a:extLst xmlns:a="http://schemas.openxmlformats.org/drawingml/2006/main">
               <a:ext uri="{FF2B5EF4-FFF2-40B4-BE49-F238E27FC236}">
-                <a16:creationId xmlns:a16="http://schemas.microsoft.com/office/drawing/2014/main" id="{1CEF0B5D-B8A9-45FF-B3FF-65936C9C5A05}"/>
+                <a16:creationId xmlns:a16="http://schemas.microsoft.com/office/drawing/2014/main" id="{5D71A743-BAED-404C-B94F-FB4925BD00F5}"/>
               </a:ext>
             </a:extLst>
           </p:cNvPr>
@@ -2275,7 +2275,7 @@
           <p:cNvPr id="8" name="bullet-copy-1">
             <a:extLst xmlns:a="http://schemas.openxmlformats.org/drawingml/2006/main">
               <a:ext uri="{FF2B5EF4-FFF2-40B4-BE49-F238E27FC236}">
-                <a16:creationId xmlns:a16="http://schemas.microsoft.com/office/drawing/2014/main" id="{00049FBC-E595-4ABF-BF94-0891F5A29BD4}"/>
+                <a16:creationId xmlns:a16="http://schemas.microsoft.com/office/drawing/2014/main" id="{5C586258-987A-40C0-B3CD-88AAF0DF3E54}"/>
               </a:ext>
             </a:extLst>
           </p:cNvPr>
@@ -2325,7 +2325,7 @@
           <p:cNvPr id="9" name="bullet-2">
             <a:extLst xmlns:a="http://schemas.openxmlformats.org/drawingml/2006/main">
               <a:ext uri="{FF2B5EF4-FFF2-40B4-BE49-F238E27FC236}">
-                <a16:creationId xmlns:a16="http://schemas.microsoft.com/office/drawing/2014/main" id="{97966D83-F9E7-45C9-A176-B75EB029A5A1}"/>
+                <a16:creationId xmlns:a16="http://schemas.microsoft.com/office/drawing/2014/main" id="{A4C0E6F4-EB9B-4439-9F74-AAD741457169}"/>
               </a:ext>
             </a:extLst>
           </p:cNvPr>
@@ -2356,7 +2356,7 @@
           <p:cNvPr id="10" name="bullet-number-2">
             <a:extLst xmlns:a="http://schemas.openxmlformats.org/drawingml/2006/main">
               <a:ext uri="{FF2B5EF4-FFF2-40B4-BE49-F238E27FC236}">
-                <a16:creationId xmlns:a16="http://schemas.microsoft.com/office/drawing/2014/main" id="{13261984-328A-4273-A973-F3E72B6F6029}"/>
+                <a16:creationId xmlns:a16="http://schemas.microsoft.com/office/drawing/2014/main" id="{1F6A8A49-3111-4B44-89A8-EAA00B7CDC64}"/>
               </a:ext>
             </a:extLst>
           </p:cNvPr>
@@ -2406,7 +2406,7 @@
           <p:cNvPr id="11" name="bullet-copy-2">
             <a:extLst xmlns:a="http://schemas.openxmlformats.org/drawingml/2006/main">
               <a:ext uri="{FF2B5EF4-FFF2-40B4-BE49-F238E27FC236}">
-                <a16:creationId xmlns:a16="http://schemas.microsoft.com/office/drawing/2014/main" id="{53E8ED1D-1762-4718-A3C2-83448BBA5C01}"/>
+                <a16:creationId xmlns:a16="http://schemas.microsoft.com/office/drawing/2014/main" id="{3A6C8FD8-FE9A-4800-9523-C5C3A0F24942}"/>
               </a:ext>
             </a:extLst>
           </p:cNvPr>
@@ -2456,7 +2456,7 @@
           <p:cNvPr id="12" name="bullet-3">
             <a:extLst xmlns:a="http://schemas.openxmlformats.org/drawingml/2006/main">
               <a:ext uri="{FF2B5EF4-FFF2-40B4-BE49-F238E27FC236}">
-                <a16:creationId xmlns:a16="http://schemas.microsoft.com/office/drawing/2014/main" id="{D8FC9AA4-8FA4-4A15-96B5-DD327F2A32C1}"/>
+                <a16:creationId xmlns:a16="http://schemas.microsoft.com/office/drawing/2014/main" id="{B5254C28-DE7E-4C1D-8CB3-1A3598ACD579}"/>
               </a:ext>
             </a:extLst>
           </p:cNvPr>
@@ -2487,7 +2487,7 @@
           <p:cNvPr id="13" name="bullet-number-3">
             <a:extLst xmlns:a="http://schemas.openxmlformats.org/drawingml/2006/main">
               <a:ext uri="{FF2B5EF4-FFF2-40B4-BE49-F238E27FC236}">
-                <a16:creationId xmlns:a16="http://schemas.microsoft.com/office/drawing/2014/main" id="{103E8ACE-4279-44B1-A4BB-5C5E63AF127D}"/>
+                <a16:creationId xmlns:a16="http://schemas.microsoft.com/office/drawing/2014/main" id="{F23F37CF-725C-40F7-81B5-861F16EF8D06}"/>
               </a:ext>
             </a:extLst>
           </p:cNvPr>
@@ -2537,7 +2537,7 @@
           <p:cNvPr id="14" name="bullet-copy-3">
             <a:extLst xmlns:a="http://schemas.openxmlformats.org/drawingml/2006/main">
               <a:ext uri="{FF2B5EF4-FFF2-40B4-BE49-F238E27FC236}">
-                <a16:creationId xmlns:a16="http://schemas.microsoft.com/office/drawing/2014/main" id="{5A78B922-E896-455B-B938-29661D87603A}"/>
+                <a16:creationId xmlns:a16="http://schemas.microsoft.com/office/drawing/2014/main" id="{BF1932C9-C827-4E74-A36C-27E1570A2A1A}"/>
               </a:ext>
             </a:extLst>
           </p:cNvPr>
@@ -2585,7 +2585,7 @@
     </p:spTree>
     <p:extLst>
       <p:ext uri="{BB962C8B-B14F-4D97-AF65-F5344CB8AC3E}">
-        <p14:creationId xmlns:p14="http://schemas.microsoft.com/office/powerpoint/2010/main" val="224540667"/>
+        <p14:creationId xmlns:p14="http://schemas.microsoft.com/office/powerpoint/2010/main" val="1650138714"/>
       </p:ext>
     </p:extLst>
   </p:cSld>
@@ -2616,7 +2616,7 @@
           <p:cNvPr id="15" name="top-rule">
             <a:extLst xmlns:a="http://schemas.openxmlformats.org/drawingml/2006/main">
               <a:ext uri="{FF2B5EF4-FFF2-40B4-BE49-F238E27FC236}">
-                <a16:creationId xmlns:a16="http://schemas.microsoft.com/office/drawing/2014/main" id="{417BE20E-9CE2-45D4-AEB3-0B8C98474B7F}"/>
+                <a16:creationId xmlns:a16="http://schemas.microsoft.com/office/drawing/2014/main" id="{774064D7-B9C3-4557-982C-AB9A903C57E4}"/>
               </a:ext>
             </a:extLst>
           </p:cNvPr>
@@ -2647,7 +2647,7 @@
           <p:cNvPr id="2" name="course-label">
             <a:extLst xmlns:a="http://schemas.openxmlformats.org/drawingml/2006/main">
               <a:ext uri="{FF2B5EF4-FFF2-40B4-BE49-F238E27FC236}">
-                <a16:creationId xmlns:a16="http://schemas.microsoft.com/office/drawing/2014/main" id="{CBB05F78-4BB9-4BCE-A725-8278C8AC3E78}"/>
+                <a16:creationId xmlns:a16="http://schemas.microsoft.com/office/drawing/2014/main" id="{3C5A6C7A-D186-4AB7-AB71-E25037AACF27}"/>
               </a:ext>
             </a:extLst>
           </p:cNvPr>
@@ -2697,7 +2697,7 @@
           <p:cNvPr id="3" name="module-label">
             <a:extLst xmlns:a="http://schemas.openxmlformats.org/drawingml/2006/main">
               <a:ext uri="{FF2B5EF4-FFF2-40B4-BE49-F238E27FC236}">
-                <a16:creationId xmlns:a16="http://schemas.microsoft.com/office/drawing/2014/main" id="{0D6A88F9-407B-4EFC-AEA5-B35E9D88C107}"/>
+                <a16:creationId xmlns:a16="http://schemas.microsoft.com/office/drawing/2014/main" id="{318DF4D8-8725-42EB-B8B6-404A98646E61}"/>
               </a:ext>
             </a:extLst>
           </p:cNvPr>
@@ -2747,7 +2747,7 @@
           <p:cNvPr id="4" name="slide-title">
             <a:extLst xmlns:a="http://schemas.openxmlformats.org/drawingml/2006/main">
               <a:ext uri="{FF2B5EF4-FFF2-40B4-BE49-F238E27FC236}">
-                <a16:creationId xmlns:a16="http://schemas.microsoft.com/office/drawing/2014/main" id="{79BB1270-DFFF-4805-934E-4CDB76B6FBEF}"/>
+                <a16:creationId xmlns:a16="http://schemas.microsoft.com/office/drawing/2014/main" id="{E2870587-51FF-42FD-A5DE-27FA38EE0D36}"/>
               </a:ext>
             </a:extLst>
           </p:cNvPr>
@@ -2797,7 +2797,7 @@
           <p:cNvPr id="5" name="slide-subtitle">
             <a:extLst xmlns:a="http://schemas.openxmlformats.org/drawingml/2006/main">
               <a:ext uri="{FF2B5EF4-FFF2-40B4-BE49-F238E27FC236}">
-                <a16:creationId xmlns:a16="http://schemas.microsoft.com/office/drawing/2014/main" id="{DCEB5F45-1F97-4789-BCFC-82DE59361314}"/>
+                <a16:creationId xmlns:a16="http://schemas.microsoft.com/office/drawing/2014/main" id="{7C500338-1AC1-4D26-A56A-3ED7D4B9A9B8}"/>
               </a:ext>
             </a:extLst>
           </p:cNvPr>
@@ -2847,7 +2847,7 @@
           <p:cNvPr id="6" name="bullet-1">
             <a:extLst xmlns:a="http://schemas.openxmlformats.org/drawingml/2006/main">
               <a:ext uri="{FF2B5EF4-FFF2-40B4-BE49-F238E27FC236}">
-                <a16:creationId xmlns:a16="http://schemas.microsoft.com/office/drawing/2014/main" id="{7B0B215C-630C-4F40-9021-F1BFE0CA2238}"/>
+                <a16:creationId xmlns:a16="http://schemas.microsoft.com/office/drawing/2014/main" id="{BCAEDF63-B18D-418F-B03C-1C79BE1AC8AA}"/>
               </a:ext>
             </a:extLst>
           </p:cNvPr>
@@ -2878,7 +2878,7 @@
           <p:cNvPr id="7" name="bullet-number-1">
             <a:extLst xmlns:a="http://schemas.openxmlformats.org/drawingml/2006/main">
               <a:ext uri="{FF2B5EF4-FFF2-40B4-BE49-F238E27FC236}">
-                <a16:creationId xmlns:a16="http://schemas.microsoft.com/office/drawing/2014/main" id="{DFDE1E9C-BFA3-4D30-9B1A-4C9380BC354E}"/>
+                <a16:creationId xmlns:a16="http://schemas.microsoft.com/office/drawing/2014/main" id="{209F7C7A-9F6A-4C07-8D35-2E0CB4EC0482}"/>
               </a:ext>
             </a:extLst>
           </p:cNvPr>
@@ -2928,7 +2928,7 @@
           <p:cNvPr id="8" name="bullet-copy-1">
             <a:extLst xmlns:a="http://schemas.openxmlformats.org/drawingml/2006/main">
               <a:ext uri="{FF2B5EF4-FFF2-40B4-BE49-F238E27FC236}">
-                <a16:creationId xmlns:a16="http://schemas.microsoft.com/office/drawing/2014/main" id="{FB4BB2C5-2F55-4469-9909-C8DDF835EF5A}"/>
+                <a16:creationId xmlns:a16="http://schemas.microsoft.com/office/drawing/2014/main" id="{95F0C1E8-77D8-47D1-84B8-5EC4B0DA4418}"/>
               </a:ext>
             </a:extLst>
           </p:cNvPr>
@@ -2978,7 +2978,7 @@
           <p:cNvPr id="9" name="bullet-2">
             <a:extLst xmlns:a="http://schemas.openxmlformats.org/drawingml/2006/main">
               <a:ext uri="{FF2B5EF4-FFF2-40B4-BE49-F238E27FC236}">
-                <a16:creationId xmlns:a16="http://schemas.microsoft.com/office/drawing/2014/main" id="{A6EC7415-C7D4-483C-BC0D-C65A4BB1CC90}"/>
+                <a16:creationId xmlns:a16="http://schemas.microsoft.com/office/drawing/2014/main" id="{09EF4140-B4FD-45ED-A150-EC3F6729F235}"/>
               </a:ext>
             </a:extLst>
           </p:cNvPr>
@@ -3009,7 +3009,7 @@
           <p:cNvPr id="10" name="bullet-number-2">
             <a:extLst xmlns:a="http://schemas.openxmlformats.org/drawingml/2006/main">
               <a:ext uri="{FF2B5EF4-FFF2-40B4-BE49-F238E27FC236}">
-                <a16:creationId xmlns:a16="http://schemas.microsoft.com/office/drawing/2014/main" id="{CA8E625F-BC5E-42C9-892C-2A6B2BF46280}"/>
+                <a16:creationId xmlns:a16="http://schemas.microsoft.com/office/drawing/2014/main" id="{E11DCA22-AC43-4C4D-B884-4ACDCFA620D0}"/>
               </a:ext>
             </a:extLst>
           </p:cNvPr>
@@ -3059,7 +3059,7 @@
           <p:cNvPr id="11" name="bullet-copy-2">
             <a:extLst xmlns:a="http://schemas.openxmlformats.org/drawingml/2006/main">
               <a:ext uri="{FF2B5EF4-FFF2-40B4-BE49-F238E27FC236}">
-                <a16:creationId xmlns:a16="http://schemas.microsoft.com/office/drawing/2014/main" id="{2530DE74-20E6-4279-8507-9940B806B6FA}"/>
+                <a16:creationId xmlns:a16="http://schemas.microsoft.com/office/drawing/2014/main" id="{3C015814-5F49-48A0-8756-3EA7ECC6B9A6}"/>
               </a:ext>
             </a:extLst>
           </p:cNvPr>
@@ -3099,7 +3099,7 @@
                   <a:srgbClr val="16343A"/>
                 </a:solidFill>
               </a:rPr>
-              <a:t>Missed guides, incorrect tension paths or a poorly seated bobbin can cause loose, tangled or uneven stitching.</a:t>
+              <a:t>Trace the complete upper path, check the needle-area threading direction, confirm the bobbin orientation and bring threads to the demonstrated starting position.</a:t>
             </a:r>
           </a:p>
         </p:txBody>
@@ -3109,7 +3109,7 @@
           <p:cNvPr id="12" name="bullet-3">
             <a:extLst xmlns:a="http://schemas.openxmlformats.org/drawingml/2006/main">
               <a:ext uri="{FF2B5EF4-FFF2-40B4-BE49-F238E27FC236}">
-                <a16:creationId xmlns:a16="http://schemas.microsoft.com/office/drawing/2014/main" id="{670BB6BD-BC85-43C4-9BFE-662F89CFA6B7}"/>
+                <a16:creationId xmlns:a16="http://schemas.microsoft.com/office/drawing/2014/main" id="{A04216BC-D202-47A4-8CFC-CF502BB2B80D}"/>
               </a:ext>
             </a:extLst>
           </p:cNvPr>
@@ -3140,7 +3140,7 @@
           <p:cNvPr id="13" name="bullet-number-3">
             <a:extLst xmlns:a="http://schemas.openxmlformats.org/drawingml/2006/main">
               <a:ext uri="{FF2B5EF4-FFF2-40B4-BE49-F238E27FC236}">
-                <a16:creationId xmlns:a16="http://schemas.microsoft.com/office/drawing/2014/main" id="{692DF6DA-D38B-4246-A8AA-345818746223}"/>
+                <a16:creationId xmlns:a16="http://schemas.microsoft.com/office/drawing/2014/main" id="{CFB50CD3-1ED6-4B1E-9BA3-1047A4B3532A}"/>
               </a:ext>
             </a:extLst>
           </p:cNvPr>
@@ -3190,7 +3190,7 @@
           <p:cNvPr id="14" name="bullet-copy-3">
             <a:extLst xmlns:a="http://schemas.openxmlformats.org/drawingml/2006/main">
               <a:ext uri="{FF2B5EF4-FFF2-40B4-BE49-F238E27FC236}">
-                <a16:creationId xmlns:a16="http://schemas.microsoft.com/office/drawing/2014/main" id="{699135CD-DAE4-492A-80E2-28454B9F096E}"/>
+                <a16:creationId xmlns:a16="http://schemas.microsoft.com/office/drawing/2014/main" id="{5294E138-BA04-4730-B252-0B675D5C7183}"/>
               </a:ext>
             </a:extLst>
           </p:cNvPr>
@@ -3230,7 +3230,7 @@
                   <a:srgbClr val="16343A"/>
                 </a:solidFill>
               </a:rPr>
-              <a:t>Prepare the machine while it is switched off and ask for a check before sewing.</a:t>
+              <a:t>One change at a time makes the cause easier to identify and prevents random settings from creating a second problem.</a:t>
             </a:r>
           </a:p>
         </p:txBody>
@@ -3238,7 +3238,7 @@
     </p:spTree>
     <p:extLst>
       <p:ext uri="{BB962C8B-B14F-4D97-AF65-F5344CB8AC3E}">
-        <p14:creationId xmlns:p14="http://schemas.microsoft.com/office/powerpoint/2010/main" val="1423499442"/>
+        <p14:creationId xmlns:p14="http://schemas.microsoft.com/office/powerpoint/2010/main" val="1779470651"/>
       </p:ext>
     </p:extLst>
   </p:cSld>
@@ -3269,7 +3269,7 @@
           <p:cNvPr id="12" name="top-rule">
             <a:extLst xmlns:a="http://schemas.openxmlformats.org/drawingml/2006/main">
               <a:ext uri="{FF2B5EF4-FFF2-40B4-BE49-F238E27FC236}">
-                <a16:creationId xmlns:a16="http://schemas.microsoft.com/office/drawing/2014/main" id="{7ECDE982-CDBE-4DE0-B590-424F9A163F35}"/>
+                <a16:creationId xmlns:a16="http://schemas.microsoft.com/office/drawing/2014/main" id="{3ABD7C1D-7E42-40D9-9D20-CCBD0FE34173}"/>
               </a:ext>
             </a:extLst>
           </p:cNvPr>
@@ -3300,7 +3300,7 @@
           <p:cNvPr id="2" name="course-label">
             <a:extLst xmlns:a="http://schemas.openxmlformats.org/drawingml/2006/main">
               <a:ext uri="{FF2B5EF4-FFF2-40B4-BE49-F238E27FC236}">
-                <a16:creationId xmlns:a16="http://schemas.microsoft.com/office/drawing/2014/main" id="{52BBD955-3D0B-4484-B7AB-2B1CEDA39EDC}"/>
+                <a16:creationId xmlns:a16="http://schemas.microsoft.com/office/drawing/2014/main" id="{1EB59BF7-A959-4059-A91B-86079AA8E347}"/>
               </a:ext>
             </a:extLst>
           </p:cNvPr>
@@ -3350,7 +3350,7 @@
           <p:cNvPr id="3" name="module-label">
             <a:extLst xmlns:a="http://schemas.openxmlformats.org/drawingml/2006/main">
               <a:ext uri="{FF2B5EF4-FFF2-40B4-BE49-F238E27FC236}">
-                <a16:creationId xmlns:a16="http://schemas.microsoft.com/office/drawing/2014/main" id="{8A44403B-E706-4349-95F4-38C6EE0633FD}"/>
+                <a16:creationId xmlns:a16="http://schemas.microsoft.com/office/drawing/2014/main" id="{29B538DF-74C7-4149-807B-889A0BA3B01E}"/>
               </a:ext>
             </a:extLst>
           </p:cNvPr>
@@ -3400,7 +3400,7 @@
           <p:cNvPr id="4" name="slide-title">
             <a:extLst xmlns:a="http://schemas.openxmlformats.org/drawingml/2006/main">
               <a:ext uri="{FF2B5EF4-FFF2-40B4-BE49-F238E27FC236}">
-                <a16:creationId xmlns:a16="http://schemas.microsoft.com/office/drawing/2014/main" id="{853F2A7C-42F6-48E3-9C2C-D4912BC80F64}"/>
+                <a16:creationId xmlns:a16="http://schemas.microsoft.com/office/drawing/2014/main" id="{0DEA81C0-48FC-4908-BA91-7B7DD20F22A1}"/>
               </a:ext>
             </a:extLst>
           </p:cNvPr>
@@ -3450,7 +3450,7 @@
           <p:cNvPr id="5" name="slide-subtitle">
             <a:extLst xmlns:a="http://schemas.openxmlformats.org/drawingml/2006/main">
               <a:ext uri="{FF2B5EF4-FFF2-40B4-BE49-F238E27FC236}">
-                <a16:creationId xmlns:a16="http://schemas.microsoft.com/office/drawing/2014/main" id="{D771A2A9-DCB5-4E03-B254-CDF389C6ACEB}"/>
+                <a16:creationId xmlns:a16="http://schemas.microsoft.com/office/drawing/2014/main" id="{58017DA8-54DF-4450-B6CE-E867F9821C15}"/>
               </a:ext>
             </a:extLst>
           </p:cNvPr>
@@ -3500,7 +3500,7 @@
           <p:cNvPr id="6" name="prompt-accent">
             <a:extLst xmlns:a="http://schemas.openxmlformats.org/drawingml/2006/main">
               <a:ext uri="{FF2B5EF4-FFF2-40B4-BE49-F238E27FC236}">
-                <a16:creationId xmlns:a16="http://schemas.microsoft.com/office/drawing/2014/main" id="{0DBEC6A0-EE80-437A-9B6E-8766F0649FFD}"/>
+                <a16:creationId xmlns:a16="http://schemas.microsoft.com/office/drawing/2014/main" id="{571EFDB6-E920-496E-AB80-464D9E65215E}"/>
               </a:ext>
             </a:extLst>
           </p:cNvPr>
@@ -3531,7 +3531,7 @@
           <p:cNvPr id="7" name="plain-language">
             <a:extLst xmlns:a="http://schemas.openxmlformats.org/drawingml/2006/main">
               <a:ext uri="{FF2B5EF4-FFF2-40B4-BE49-F238E27FC236}">
-                <a16:creationId xmlns:a16="http://schemas.microsoft.com/office/drawing/2014/main" id="{0BB61E29-3DC7-4845-8353-26FBD5354846}"/>
+                <a16:creationId xmlns:a16="http://schemas.microsoft.com/office/drawing/2014/main" id="{F8E6646F-1EDD-47FC-AE65-B6E22531EBDE}"/>
               </a:ext>
             </a:extLst>
           </p:cNvPr>
@@ -3581,7 +3581,7 @@
           <p:cNvPr id="8" name="clarify">
             <a:extLst xmlns:a="http://schemas.openxmlformats.org/drawingml/2006/main">
               <a:ext uri="{FF2B5EF4-FFF2-40B4-BE49-F238E27FC236}">
-                <a16:creationId xmlns:a16="http://schemas.microsoft.com/office/drawing/2014/main" id="{2A768E4E-A8D5-42E5-A00A-0A00B5EE6570}"/>
+                <a16:creationId xmlns:a16="http://schemas.microsoft.com/office/drawing/2014/main" id="{A4DE4138-2349-443F-BCFD-F2EDEF95B37A}"/>
               </a:ext>
             </a:extLst>
           </p:cNvPr>
@@ -3631,7 +3631,7 @@
           <p:cNvPr id="9" name="starter-label">
             <a:extLst xmlns:a="http://schemas.openxmlformats.org/drawingml/2006/main">
               <a:ext uri="{FF2B5EF4-FFF2-40B4-BE49-F238E27FC236}">
-                <a16:creationId xmlns:a16="http://schemas.microsoft.com/office/drawing/2014/main" id="{FEB87B3B-38D9-4D58-B2B9-81C58F324BE5}"/>
+                <a16:creationId xmlns:a16="http://schemas.microsoft.com/office/drawing/2014/main" id="{5C278000-F1D9-4818-A05B-A5FF51C30CC3}"/>
               </a:ext>
             </a:extLst>
           </p:cNvPr>
@@ -3681,7 +3681,7 @@
           <p:cNvPr id="10" name="starter">
             <a:extLst xmlns:a="http://schemas.openxmlformats.org/drawingml/2006/main">
               <a:ext uri="{FF2B5EF4-FFF2-40B4-BE49-F238E27FC236}">
-                <a16:creationId xmlns:a16="http://schemas.microsoft.com/office/drawing/2014/main" id="{1749EFDB-4D45-49D9-B87F-E1AF746591F7}"/>
+                <a16:creationId xmlns:a16="http://schemas.microsoft.com/office/drawing/2014/main" id="{3C519DDD-E307-4B9F-A683-6D84A8289C4F}"/>
               </a:ext>
             </a:extLst>
           </p:cNvPr>
@@ -3731,7 +3731,7 @@
           <p:cNvPr id="11" name="action">
             <a:extLst xmlns:a="http://schemas.openxmlformats.org/drawingml/2006/main">
               <a:ext uri="{FF2B5EF4-FFF2-40B4-BE49-F238E27FC236}">
-                <a16:creationId xmlns:a16="http://schemas.microsoft.com/office/drawing/2014/main" id="{11B829D0-1CDB-4F9E-AC83-B36D73C88EFF}"/>
+                <a16:creationId xmlns:a16="http://schemas.microsoft.com/office/drawing/2014/main" id="{6B90C5E7-F3C1-4089-9B0C-78B5F493FEDF}"/>
               </a:ext>
             </a:extLst>
           </p:cNvPr>
@@ -3779,7 +3779,7 @@
     </p:spTree>
     <p:extLst>
       <p:ext uri="{BB962C8B-B14F-4D97-AF65-F5344CB8AC3E}">
-        <p14:creationId xmlns:p14="http://schemas.microsoft.com/office/powerpoint/2010/main" val="1433748760"/>
+        <p14:creationId xmlns:p14="http://schemas.microsoft.com/office/powerpoint/2010/main" val="827788401"/>
       </p:ext>
     </p:extLst>
   </p:cSld>
@@ -3810,7 +3810,7 @@
           <p:cNvPr id="15" name="top-rule">
             <a:extLst xmlns:a="http://schemas.openxmlformats.org/drawingml/2006/main">
               <a:ext uri="{FF2B5EF4-FFF2-40B4-BE49-F238E27FC236}">
-                <a16:creationId xmlns:a16="http://schemas.microsoft.com/office/drawing/2014/main" id="{8DE8D24F-B9F0-4E7D-8887-6E8FB8C66061}"/>
+                <a16:creationId xmlns:a16="http://schemas.microsoft.com/office/drawing/2014/main" id="{9DCE7D0F-D901-47A9-8755-762EC987725A}"/>
               </a:ext>
             </a:extLst>
           </p:cNvPr>
@@ -3841,7 +3841,7 @@
           <p:cNvPr id="2" name="course-label">
             <a:extLst xmlns:a="http://schemas.openxmlformats.org/drawingml/2006/main">
               <a:ext uri="{FF2B5EF4-FFF2-40B4-BE49-F238E27FC236}">
-                <a16:creationId xmlns:a16="http://schemas.microsoft.com/office/drawing/2014/main" id="{15046289-F4E3-4EA6-AF7D-47757805FD9C}"/>
+                <a16:creationId xmlns:a16="http://schemas.microsoft.com/office/drawing/2014/main" id="{51E2054E-899C-450E-BB31-F249FD09F2CC}"/>
               </a:ext>
             </a:extLst>
           </p:cNvPr>
@@ -3891,7 +3891,7 @@
           <p:cNvPr id="3" name="module-label">
             <a:extLst xmlns:a="http://schemas.openxmlformats.org/drawingml/2006/main">
               <a:ext uri="{FF2B5EF4-FFF2-40B4-BE49-F238E27FC236}">
-                <a16:creationId xmlns:a16="http://schemas.microsoft.com/office/drawing/2014/main" id="{697CFF5C-A152-4881-A7F9-A5A9C639D48A}"/>
+                <a16:creationId xmlns:a16="http://schemas.microsoft.com/office/drawing/2014/main" id="{F89090A0-5438-41CD-A955-EA7D79ECE25F}"/>
               </a:ext>
             </a:extLst>
           </p:cNvPr>
@@ -3941,7 +3941,7 @@
           <p:cNvPr id="4" name="slide-title">
             <a:extLst xmlns:a="http://schemas.openxmlformats.org/drawingml/2006/main">
               <a:ext uri="{FF2B5EF4-FFF2-40B4-BE49-F238E27FC236}">
-                <a16:creationId xmlns:a16="http://schemas.microsoft.com/office/drawing/2014/main" id="{88EB8A0B-6B20-429B-ABE2-D56B8D7E1C51}"/>
+                <a16:creationId xmlns:a16="http://schemas.microsoft.com/office/drawing/2014/main" id="{90029738-0E87-4141-8507-573B793BB0B2}"/>
               </a:ext>
             </a:extLst>
           </p:cNvPr>
@@ -3991,7 +3991,7 @@
           <p:cNvPr id="5" name="slide-subtitle">
             <a:extLst xmlns:a="http://schemas.openxmlformats.org/drawingml/2006/main">
               <a:ext uri="{FF2B5EF4-FFF2-40B4-BE49-F238E27FC236}">
-                <a16:creationId xmlns:a16="http://schemas.microsoft.com/office/drawing/2014/main" id="{8B651457-6A9A-4E8E-A474-C71E9C78EA0C}"/>
+                <a16:creationId xmlns:a16="http://schemas.microsoft.com/office/drawing/2014/main" id="{15309A1A-2F37-4093-98EB-34677BC652EE}"/>
               </a:ext>
             </a:extLst>
           </p:cNvPr>
@@ -4041,7 +4041,7 @@
           <p:cNvPr id="6" name="bullet-1">
             <a:extLst xmlns:a="http://schemas.openxmlformats.org/drawingml/2006/main">
               <a:ext uri="{FF2B5EF4-FFF2-40B4-BE49-F238E27FC236}">
-                <a16:creationId xmlns:a16="http://schemas.microsoft.com/office/drawing/2014/main" id="{DCEABAC4-3182-452A-BC13-AAC016527AD1}"/>
+                <a16:creationId xmlns:a16="http://schemas.microsoft.com/office/drawing/2014/main" id="{02049D4E-5388-43D6-A395-34FEBF33DB51}"/>
               </a:ext>
             </a:extLst>
           </p:cNvPr>
@@ -4072,7 +4072,7 @@
           <p:cNvPr id="7" name="bullet-number-1">
             <a:extLst xmlns:a="http://schemas.openxmlformats.org/drawingml/2006/main">
               <a:ext uri="{FF2B5EF4-FFF2-40B4-BE49-F238E27FC236}">
-                <a16:creationId xmlns:a16="http://schemas.microsoft.com/office/drawing/2014/main" id="{2C38D3EA-E708-4281-8F0C-128FF8268DAE}"/>
+                <a16:creationId xmlns:a16="http://schemas.microsoft.com/office/drawing/2014/main" id="{F9E4906C-8097-4D33-B383-BF29FDFE1147}"/>
               </a:ext>
             </a:extLst>
           </p:cNvPr>
@@ -4122,7 +4122,7 @@
           <p:cNvPr id="8" name="bullet-copy-1">
             <a:extLst xmlns:a="http://schemas.openxmlformats.org/drawingml/2006/main">
               <a:ext uri="{FF2B5EF4-FFF2-40B4-BE49-F238E27FC236}">
-                <a16:creationId xmlns:a16="http://schemas.microsoft.com/office/drawing/2014/main" id="{30019193-1442-422F-844E-1D50BAAF47C0}"/>
+                <a16:creationId xmlns:a16="http://schemas.microsoft.com/office/drawing/2014/main" id="{570DEF88-2D7D-4FCA-AAD3-2F4739D683DA}"/>
               </a:ext>
             </a:extLst>
           </p:cNvPr>
@@ -4172,7 +4172,7 @@
           <p:cNvPr id="9" name="bullet-2">
             <a:extLst xmlns:a="http://schemas.openxmlformats.org/drawingml/2006/main">
               <a:ext uri="{FF2B5EF4-FFF2-40B4-BE49-F238E27FC236}">
-                <a16:creationId xmlns:a16="http://schemas.microsoft.com/office/drawing/2014/main" id="{B4826C8F-5FE9-4CE7-A1FB-7E7FDB1822AB}"/>
+                <a16:creationId xmlns:a16="http://schemas.microsoft.com/office/drawing/2014/main" id="{9E8A57DB-59E9-46D0-94EF-EE87B00F8F21}"/>
               </a:ext>
             </a:extLst>
           </p:cNvPr>
@@ -4203,7 +4203,7 @@
           <p:cNvPr id="10" name="bullet-number-2">
             <a:extLst xmlns:a="http://schemas.openxmlformats.org/drawingml/2006/main">
               <a:ext uri="{FF2B5EF4-FFF2-40B4-BE49-F238E27FC236}">
-                <a16:creationId xmlns:a16="http://schemas.microsoft.com/office/drawing/2014/main" id="{33988C04-D845-4229-94F6-8E926805834A}"/>
+                <a16:creationId xmlns:a16="http://schemas.microsoft.com/office/drawing/2014/main" id="{29CEC55A-798F-4600-AFCA-65AE29F016E3}"/>
               </a:ext>
             </a:extLst>
           </p:cNvPr>
@@ -4253,7 +4253,7 @@
           <p:cNvPr id="11" name="bullet-copy-2">
             <a:extLst xmlns:a="http://schemas.openxmlformats.org/drawingml/2006/main">
               <a:ext uri="{FF2B5EF4-FFF2-40B4-BE49-F238E27FC236}">
-                <a16:creationId xmlns:a16="http://schemas.microsoft.com/office/drawing/2014/main" id="{4581AED5-90BB-408A-897D-D67E14306C02}"/>
+                <a16:creationId xmlns:a16="http://schemas.microsoft.com/office/drawing/2014/main" id="{0370596A-ADD3-4448-B6F2-2EE875086725}"/>
               </a:ext>
             </a:extLst>
           </p:cNvPr>
@@ -4293,7 +4293,7 @@
                   <a:srgbClr val="16343A"/>
                 </a:solidFill>
               </a:rPr>
-              <a:t>Watch the seam guide rather than staring only at the needle.</a:t>
+              <a:t>Secure stitching using the teacher-approved method, stop with control and remove work without pulling against the needle.</a:t>
             </a:r>
           </a:p>
         </p:txBody>
@@ -4303,7 +4303,7 @@
           <p:cNvPr id="12" name="bullet-3">
             <a:extLst xmlns:a="http://schemas.openxmlformats.org/drawingml/2006/main">
               <a:ext uri="{FF2B5EF4-FFF2-40B4-BE49-F238E27FC236}">
-                <a16:creationId xmlns:a16="http://schemas.microsoft.com/office/drawing/2014/main" id="{D2C7D019-02B3-44B5-B0B5-35282D283679}"/>
+                <a16:creationId xmlns:a16="http://schemas.microsoft.com/office/drawing/2014/main" id="{3AA7A497-54C5-41F1-838F-318957AC0E2F}"/>
               </a:ext>
             </a:extLst>
           </p:cNvPr>
@@ -4334,7 +4334,7 @@
           <p:cNvPr id="13" name="bullet-number-3">
             <a:extLst xmlns:a="http://schemas.openxmlformats.org/drawingml/2006/main">
               <a:ext uri="{FF2B5EF4-FFF2-40B4-BE49-F238E27FC236}">
-                <a16:creationId xmlns:a16="http://schemas.microsoft.com/office/drawing/2014/main" id="{7462F0B5-AFBA-483C-BC9C-07718FF33BE8}"/>
+                <a16:creationId xmlns:a16="http://schemas.microsoft.com/office/drawing/2014/main" id="{E1B5EAA6-4210-4552-A7D5-A91C6D57F675}"/>
               </a:ext>
             </a:extLst>
           </p:cNvPr>
@@ -4384,7 +4384,7 @@
           <p:cNvPr id="14" name="bullet-copy-3">
             <a:extLst xmlns:a="http://schemas.openxmlformats.org/drawingml/2006/main">
               <a:ext uri="{FF2B5EF4-FFF2-40B4-BE49-F238E27FC236}">
-                <a16:creationId xmlns:a16="http://schemas.microsoft.com/office/drawing/2014/main" id="{750525ED-8538-4FE9-A5E5-95F931BDEAA8}"/>
+                <a16:creationId xmlns:a16="http://schemas.microsoft.com/office/drawing/2014/main" id="{DDA3CA98-3A4C-4137-ACAB-8536DDB0E84B}"/>
               </a:ext>
             </a:extLst>
           </p:cNvPr>
@@ -4424,7 +4424,7 @@
                   <a:srgbClr val="16343A"/>
                 </a:solidFill>
               </a:rPr>
-              <a:t>Control speed so the fabric remains aligned.</a:t>
+              <a:t>Support the fabric so its weight does not drag the seam sideways.</a:t>
             </a:r>
           </a:p>
         </p:txBody>
@@ -4432,7 +4432,7 @@
     </p:spTree>
     <p:extLst>
       <p:ext uri="{BB962C8B-B14F-4D97-AF65-F5344CB8AC3E}">
-        <p14:creationId xmlns:p14="http://schemas.microsoft.com/office/powerpoint/2010/main" val="1561914040"/>
+        <p14:creationId xmlns:p14="http://schemas.microsoft.com/office/powerpoint/2010/main" val="687491559"/>
       </p:ext>
     </p:extLst>
   </p:cSld>
@@ -4463,7 +4463,7 @@
           <p:cNvPr id="12" name="top-rule">
             <a:extLst xmlns:a="http://schemas.openxmlformats.org/drawingml/2006/main">
               <a:ext uri="{FF2B5EF4-FFF2-40B4-BE49-F238E27FC236}">
-                <a16:creationId xmlns:a16="http://schemas.microsoft.com/office/drawing/2014/main" id="{0DAC2267-460C-42B3-920B-51D75DB84DED}"/>
+                <a16:creationId xmlns:a16="http://schemas.microsoft.com/office/drawing/2014/main" id="{74EA2289-D245-440E-8203-4D7411B001AF}"/>
               </a:ext>
             </a:extLst>
           </p:cNvPr>
@@ -4494,7 +4494,7 @@
           <p:cNvPr id="2" name="course-label">
             <a:extLst xmlns:a="http://schemas.openxmlformats.org/drawingml/2006/main">
               <a:ext uri="{FF2B5EF4-FFF2-40B4-BE49-F238E27FC236}">
-                <a16:creationId xmlns:a16="http://schemas.microsoft.com/office/drawing/2014/main" id="{740DF5FC-632B-4D07-A944-75C9BA477E02}"/>
+                <a16:creationId xmlns:a16="http://schemas.microsoft.com/office/drawing/2014/main" id="{394A1C12-F6AD-434E-B90F-1E0D250438B4}"/>
               </a:ext>
             </a:extLst>
           </p:cNvPr>
@@ -4544,7 +4544,7 @@
           <p:cNvPr id="3" name="module-label">
             <a:extLst xmlns:a="http://schemas.openxmlformats.org/drawingml/2006/main">
               <a:ext uri="{FF2B5EF4-FFF2-40B4-BE49-F238E27FC236}">
-                <a16:creationId xmlns:a16="http://schemas.microsoft.com/office/drawing/2014/main" id="{0AFE6FBD-453F-475F-BE20-3AF45C611711}"/>
+                <a16:creationId xmlns:a16="http://schemas.microsoft.com/office/drawing/2014/main" id="{42F9BA36-8AE4-4A55-9955-E9C1E4E99E21}"/>
               </a:ext>
             </a:extLst>
           </p:cNvPr>
@@ -4594,7 +4594,7 @@
           <p:cNvPr id="4" name="slide-title">
             <a:extLst xmlns:a="http://schemas.openxmlformats.org/drawingml/2006/main">
               <a:ext uri="{FF2B5EF4-FFF2-40B4-BE49-F238E27FC236}">
-                <a16:creationId xmlns:a16="http://schemas.microsoft.com/office/drawing/2014/main" id="{4AF058E5-10A1-4E09-B0A8-3EE411A24F00}"/>
+                <a16:creationId xmlns:a16="http://schemas.microsoft.com/office/drawing/2014/main" id="{76966756-BCA0-474E-B319-F4D5B1C44416}"/>
               </a:ext>
             </a:extLst>
           </p:cNvPr>
@@ -4644,7 +4644,7 @@
           <p:cNvPr id="5" name="slide-subtitle">
             <a:extLst xmlns:a="http://schemas.openxmlformats.org/drawingml/2006/main">
               <a:ext uri="{FF2B5EF4-FFF2-40B4-BE49-F238E27FC236}">
-                <a16:creationId xmlns:a16="http://schemas.microsoft.com/office/drawing/2014/main" id="{1270C891-3B55-4C24-A955-090BB5EA636F}"/>
+                <a16:creationId xmlns:a16="http://schemas.microsoft.com/office/drawing/2014/main" id="{AE317209-9D6C-4034-8BEC-07C22D9C3612}"/>
               </a:ext>
             </a:extLst>
           </p:cNvPr>
@@ -4694,7 +4694,7 @@
           <p:cNvPr id="6" name="prompt-accent">
             <a:extLst xmlns:a="http://schemas.openxmlformats.org/drawingml/2006/main">
               <a:ext uri="{FF2B5EF4-FFF2-40B4-BE49-F238E27FC236}">
-                <a16:creationId xmlns:a16="http://schemas.microsoft.com/office/drawing/2014/main" id="{08561948-C874-4AB0-9BF7-616F3E8552AB}"/>
+                <a16:creationId xmlns:a16="http://schemas.microsoft.com/office/drawing/2014/main" id="{E4761BDA-94E7-4F23-8E93-278BE55E59FD}"/>
               </a:ext>
             </a:extLst>
           </p:cNvPr>
@@ -4725,7 +4725,7 @@
           <p:cNvPr id="7" name="plain-language">
             <a:extLst xmlns:a="http://schemas.openxmlformats.org/drawingml/2006/main">
               <a:ext uri="{FF2B5EF4-FFF2-40B4-BE49-F238E27FC236}">
-                <a16:creationId xmlns:a16="http://schemas.microsoft.com/office/drawing/2014/main" id="{60141026-5DC9-45B6-90DB-65956D2659B8}"/>
+                <a16:creationId xmlns:a16="http://schemas.microsoft.com/office/drawing/2014/main" id="{A861A9F1-08B8-48A8-B5BC-CE34A0B8CA6A}"/>
               </a:ext>
             </a:extLst>
           </p:cNvPr>
@@ -4775,7 +4775,7 @@
           <p:cNvPr id="8" name="clarify">
             <a:extLst xmlns:a="http://schemas.openxmlformats.org/drawingml/2006/main">
               <a:ext uri="{FF2B5EF4-FFF2-40B4-BE49-F238E27FC236}">
-                <a16:creationId xmlns:a16="http://schemas.microsoft.com/office/drawing/2014/main" id="{69710812-6288-443B-8B41-47F1ECA43CF2}"/>
+                <a16:creationId xmlns:a16="http://schemas.microsoft.com/office/drawing/2014/main" id="{2E5E1865-B98D-45DE-BD08-0C204FC5993E}"/>
               </a:ext>
             </a:extLst>
           </p:cNvPr>
@@ -4825,7 +4825,7 @@
           <p:cNvPr id="9" name="starter-label">
             <a:extLst xmlns:a="http://schemas.openxmlformats.org/drawingml/2006/main">
               <a:ext uri="{FF2B5EF4-FFF2-40B4-BE49-F238E27FC236}">
-                <a16:creationId xmlns:a16="http://schemas.microsoft.com/office/drawing/2014/main" id="{70C94C66-82C2-444C-A6FF-CF943FFB2A67}"/>
+                <a16:creationId xmlns:a16="http://schemas.microsoft.com/office/drawing/2014/main" id="{77E14E83-41ED-4450-B7D9-9C0EB5B015F3}"/>
               </a:ext>
             </a:extLst>
           </p:cNvPr>
@@ -4875,7 +4875,7 @@
           <p:cNvPr id="10" name="starter">
             <a:extLst xmlns:a="http://schemas.openxmlformats.org/drawingml/2006/main">
               <a:ext uri="{FF2B5EF4-FFF2-40B4-BE49-F238E27FC236}">
-                <a16:creationId xmlns:a16="http://schemas.microsoft.com/office/drawing/2014/main" id="{FF138873-F513-4E4E-9985-90ED6E62EC4F}"/>
+                <a16:creationId xmlns:a16="http://schemas.microsoft.com/office/drawing/2014/main" id="{DD6561F8-5E14-4936-BF37-CAD5EDB738D5}"/>
               </a:ext>
             </a:extLst>
           </p:cNvPr>
@@ -4925,7 +4925,7 @@
           <p:cNvPr id="11" name="action">
             <a:extLst xmlns:a="http://schemas.openxmlformats.org/drawingml/2006/main">
               <a:ext uri="{FF2B5EF4-FFF2-40B4-BE49-F238E27FC236}">
-                <a16:creationId xmlns:a16="http://schemas.microsoft.com/office/drawing/2014/main" id="{7033C633-1679-4E3C-971E-97AA53CBBC68}"/>
+                <a16:creationId xmlns:a16="http://schemas.microsoft.com/office/drawing/2014/main" id="{271B8BF2-7785-4FA7-A9F5-AB5EFADAF15F}"/>
               </a:ext>
             </a:extLst>
           </p:cNvPr>
@@ -4973,7 +4973,7 @@
     </p:spTree>
     <p:extLst>
       <p:ext uri="{BB962C8B-B14F-4D97-AF65-F5344CB8AC3E}">
-        <p14:creationId xmlns:p14="http://schemas.microsoft.com/office/powerpoint/2010/main" val="1798350789"/>
+        <p14:creationId xmlns:p14="http://schemas.microsoft.com/office/powerpoint/2010/main" val="238652463"/>
       </p:ext>
     </p:extLst>
   </p:cSld>
@@ -5004,7 +5004,7 @@
           <p:cNvPr id="15" name="top-rule">
             <a:extLst xmlns:a="http://schemas.openxmlformats.org/drawingml/2006/main">
               <a:ext uri="{FF2B5EF4-FFF2-40B4-BE49-F238E27FC236}">
-                <a16:creationId xmlns:a16="http://schemas.microsoft.com/office/drawing/2014/main" id="{20375C21-3352-4663-A273-ACD8288BA5F9}"/>
+                <a16:creationId xmlns:a16="http://schemas.microsoft.com/office/drawing/2014/main" id="{86F5D91D-11D9-4229-8899-2671065969EB}"/>
               </a:ext>
             </a:extLst>
           </p:cNvPr>
@@ -5035,7 +5035,7 @@
           <p:cNvPr id="2" name="course-label">
             <a:extLst xmlns:a="http://schemas.openxmlformats.org/drawingml/2006/main">
               <a:ext uri="{FF2B5EF4-FFF2-40B4-BE49-F238E27FC236}">
-                <a16:creationId xmlns:a16="http://schemas.microsoft.com/office/drawing/2014/main" id="{619DB1F2-AB12-4CBF-ACD7-FACA4813CB74}"/>
+                <a16:creationId xmlns:a16="http://schemas.microsoft.com/office/drawing/2014/main" id="{985911AB-FD04-46B8-8F7F-4C8342B9AC9C}"/>
               </a:ext>
             </a:extLst>
           </p:cNvPr>
@@ -5085,7 +5085,7 @@
           <p:cNvPr id="3" name="module-label">
             <a:extLst xmlns:a="http://schemas.openxmlformats.org/drawingml/2006/main">
               <a:ext uri="{FF2B5EF4-FFF2-40B4-BE49-F238E27FC236}">
-                <a16:creationId xmlns:a16="http://schemas.microsoft.com/office/drawing/2014/main" id="{1DC63DE8-42F3-4753-A7FB-1239D9AF5016}"/>
+                <a16:creationId xmlns:a16="http://schemas.microsoft.com/office/drawing/2014/main" id="{75DF6731-9741-4812-AB2D-7640CCFB097E}"/>
               </a:ext>
             </a:extLst>
           </p:cNvPr>
@@ -5135,7 +5135,7 @@
           <p:cNvPr id="4" name="slide-title">
             <a:extLst xmlns:a="http://schemas.openxmlformats.org/drawingml/2006/main">
               <a:ext uri="{FF2B5EF4-FFF2-40B4-BE49-F238E27FC236}">
-                <a16:creationId xmlns:a16="http://schemas.microsoft.com/office/drawing/2014/main" id="{F5C89998-FAAD-4076-B3D0-1CFC866BE113}"/>
+                <a16:creationId xmlns:a16="http://schemas.microsoft.com/office/drawing/2014/main" id="{73561F4D-8FD4-46C4-9410-821479E0AC06}"/>
               </a:ext>
             </a:extLst>
           </p:cNvPr>
@@ -5185,7 +5185,7 @@
           <p:cNvPr id="5" name="slide-subtitle">
             <a:extLst xmlns:a="http://schemas.openxmlformats.org/drawingml/2006/main">
               <a:ext uri="{FF2B5EF4-FFF2-40B4-BE49-F238E27FC236}">
-                <a16:creationId xmlns:a16="http://schemas.microsoft.com/office/drawing/2014/main" id="{A212C630-9BBA-4C29-ADFA-4CE234186B26}"/>
+                <a16:creationId xmlns:a16="http://schemas.microsoft.com/office/drawing/2014/main" id="{4185475A-E12E-4D40-80A1-3E37048316B3}"/>
               </a:ext>
             </a:extLst>
           </p:cNvPr>
@@ -5235,7 +5235,7 @@
           <p:cNvPr id="6" name="bullet-1">
             <a:extLst xmlns:a="http://schemas.openxmlformats.org/drawingml/2006/main">
               <a:ext uri="{FF2B5EF4-FFF2-40B4-BE49-F238E27FC236}">
-                <a16:creationId xmlns:a16="http://schemas.microsoft.com/office/drawing/2014/main" id="{F5209819-18E2-4D33-8EAA-5D858BD3E74C}"/>
+                <a16:creationId xmlns:a16="http://schemas.microsoft.com/office/drawing/2014/main" id="{EF43FC5A-3D8A-437B-B624-F88558C4964E}"/>
               </a:ext>
             </a:extLst>
           </p:cNvPr>
@@ -5266,7 +5266,7 @@
           <p:cNvPr id="7" name="bullet-number-1">
             <a:extLst xmlns:a="http://schemas.openxmlformats.org/drawingml/2006/main">
               <a:ext uri="{FF2B5EF4-FFF2-40B4-BE49-F238E27FC236}">
-                <a16:creationId xmlns:a16="http://schemas.microsoft.com/office/drawing/2014/main" id="{B9B3BE76-5E4A-426D-984C-2DF0B39863CD}"/>
+                <a16:creationId xmlns:a16="http://schemas.microsoft.com/office/drawing/2014/main" id="{FEE6618B-DDB4-4690-B215-75E656EB7286}"/>
               </a:ext>
             </a:extLst>
           </p:cNvPr>
@@ -5316,7 +5316,7 @@
           <p:cNvPr id="8" name="bullet-copy-1">
             <a:extLst xmlns:a="http://schemas.openxmlformats.org/drawingml/2006/main">
               <a:ext uri="{FF2B5EF4-FFF2-40B4-BE49-F238E27FC236}">
-                <a16:creationId xmlns:a16="http://schemas.microsoft.com/office/drawing/2014/main" id="{F2773B77-24D4-4423-AD79-A9CF23956BAA}"/>
+                <a16:creationId xmlns:a16="http://schemas.microsoft.com/office/drawing/2014/main" id="{01EF84C0-17D0-46B6-8BDB-2A77795D7360}"/>
               </a:ext>
             </a:extLst>
           </p:cNvPr>
@@ -5366,7 +5366,7 @@
           <p:cNvPr id="9" name="bullet-2">
             <a:extLst xmlns:a="http://schemas.openxmlformats.org/drawingml/2006/main">
               <a:ext uri="{FF2B5EF4-FFF2-40B4-BE49-F238E27FC236}">
-                <a16:creationId xmlns:a16="http://schemas.microsoft.com/office/drawing/2014/main" id="{58507137-FADF-4362-978C-800039A07FC2}"/>
+                <a16:creationId xmlns:a16="http://schemas.microsoft.com/office/drawing/2014/main" id="{D1733DAF-DA1E-4D75-8F84-49BE05D5DF1D}"/>
               </a:ext>
             </a:extLst>
           </p:cNvPr>
@@ -5397,7 +5397,7 @@
           <p:cNvPr id="10" name="bullet-number-2">
             <a:extLst xmlns:a="http://schemas.openxmlformats.org/drawingml/2006/main">
               <a:ext uri="{FF2B5EF4-FFF2-40B4-BE49-F238E27FC236}">
-                <a16:creationId xmlns:a16="http://schemas.microsoft.com/office/drawing/2014/main" id="{A2B2E8C5-73D5-44F2-8347-704508F68CF2}"/>
+                <a16:creationId xmlns:a16="http://schemas.microsoft.com/office/drawing/2014/main" id="{850257C7-56B2-4B09-A645-A429C8E871CD}"/>
               </a:ext>
             </a:extLst>
           </p:cNvPr>
@@ -5447,7 +5447,7 @@
           <p:cNvPr id="11" name="bullet-copy-2">
             <a:extLst xmlns:a="http://schemas.openxmlformats.org/drawingml/2006/main">
               <a:ext uri="{FF2B5EF4-FFF2-40B4-BE49-F238E27FC236}">
-                <a16:creationId xmlns:a16="http://schemas.microsoft.com/office/drawing/2014/main" id="{0C4FEB34-9955-42B1-81E8-329F5B4A28D2}"/>
+                <a16:creationId xmlns:a16="http://schemas.microsoft.com/office/drawing/2014/main" id="{35AFA339-3105-443B-B777-69BDBE92249E}"/>
               </a:ext>
             </a:extLst>
           </p:cNvPr>
@@ -5487,7 +5487,7 @@
                   <a:srgbClr val="16343A"/>
                 </a:solidFill>
               </a:rPr>
-              <a:t>Problems can come from threading, needle condition, bobbin placement, unsuitable settings or the way fabric is handled.</a:t>
+              <a:t>Do not keep sewing over a fault—check with the teacher and record the cause and correction.</a:t>
             </a:r>
           </a:p>
         </p:txBody>
@@ -5497,7 +5497,7 @@
           <p:cNvPr id="12" name="bullet-3">
             <a:extLst xmlns:a="http://schemas.openxmlformats.org/drawingml/2006/main">
               <a:ext uri="{FF2B5EF4-FFF2-40B4-BE49-F238E27FC236}">
-                <a16:creationId xmlns:a16="http://schemas.microsoft.com/office/drawing/2014/main" id="{046D5F23-796B-46AC-B1ED-FA1B0FD612F4}"/>
+                <a16:creationId xmlns:a16="http://schemas.microsoft.com/office/drawing/2014/main" id="{B410EDAD-F65D-4BC9-856D-BF1DAA9B2C66}"/>
               </a:ext>
             </a:extLst>
           </p:cNvPr>
@@ -5528,7 +5528,7 @@
           <p:cNvPr id="13" name="bullet-number-3">
             <a:extLst xmlns:a="http://schemas.openxmlformats.org/drawingml/2006/main">
               <a:ext uri="{FF2B5EF4-FFF2-40B4-BE49-F238E27FC236}">
-                <a16:creationId xmlns:a16="http://schemas.microsoft.com/office/drawing/2014/main" id="{2CD7FED3-3648-44CF-8226-1A5EF84CB6DD}"/>
+                <a16:creationId xmlns:a16="http://schemas.microsoft.com/office/drawing/2014/main" id="{D362C068-83B0-42DC-8B6B-86B192D9D3AB}"/>
               </a:ext>
             </a:extLst>
           </p:cNvPr>
@@ -5578,7 +5578,7 @@
           <p:cNvPr id="14" name="bullet-copy-3">
             <a:extLst xmlns:a="http://schemas.openxmlformats.org/drawingml/2006/main">
               <a:ext uri="{FF2B5EF4-FFF2-40B4-BE49-F238E27FC236}">
-                <a16:creationId xmlns:a16="http://schemas.microsoft.com/office/drawing/2014/main" id="{4E491A99-4AD6-4E63-A23A-95A5BD473682}"/>
+                <a16:creationId xmlns:a16="http://schemas.microsoft.com/office/drawing/2014/main" id="{C4767A21-DCC6-4D57-BEF9-A75874C597B7}"/>
               </a:ext>
             </a:extLst>
           </p:cNvPr>
@@ -5618,7 +5618,7 @@
                   <a:srgbClr val="16343A"/>
                 </a:solidFill>
               </a:rPr>
-              <a:t>Stop when stitching changes unexpectedly.</a:t>
+              <a:t>Loops can indicate a threading or setup issue; puckering may involve material, stitch choice, handling or setup; skipped stitches may require a teacher check of the n…</a:t>
             </a:r>
           </a:p>
         </p:txBody>
@@ -5626,7 +5626,7 @@
     </p:spTree>
     <p:extLst>
       <p:ext uri="{BB962C8B-B14F-4D97-AF65-F5344CB8AC3E}">
-        <p14:creationId xmlns:p14="http://schemas.microsoft.com/office/powerpoint/2010/main" val="521100626"/>
+        <p14:creationId xmlns:p14="http://schemas.microsoft.com/office/powerpoint/2010/main" val="1207316929"/>
       </p:ext>
     </p:extLst>
   </p:cSld>
@@ -5657,7 +5657,7 @@
           <p:cNvPr id="6" name="closing-rule">
             <a:extLst xmlns:a="http://schemas.openxmlformats.org/drawingml/2006/main">
               <a:ext uri="{FF2B5EF4-FFF2-40B4-BE49-F238E27FC236}">
-                <a16:creationId xmlns:a16="http://schemas.microsoft.com/office/drawing/2014/main" id="{2834283A-AF85-48BC-B493-94F1A080E805}"/>
+                <a16:creationId xmlns:a16="http://schemas.microsoft.com/office/drawing/2014/main" id="{18232287-0A3A-4C12-B833-4495BBBB64BA}"/>
               </a:ext>
             </a:extLst>
           </p:cNvPr>
@@ -5688,7 +5688,7 @@
           <p:cNvPr id="2" name="closing-kicker">
             <a:extLst xmlns:a="http://schemas.openxmlformats.org/drawingml/2006/main">
               <a:ext uri="{FF2B5EF4-FFF2-40B4-BE49-F238E27FC236}">
-                <a16:creationId xmlns:a16="http://schemas.microsoft.com/office/drawing/2014/main" id="{E533D68B-1606-47BB-806E-2841B8CE6BF6}"/>
+                <a16:creationId xmlns:a16="http://schemas.microsoft.com/office/drawing/2014/main" id="{D062728C-69C9-4FB1-8CDC-E0FA130752B3}"/>
               </a:ext>
             </a:extLst>
           </p:cNvPr>
@@ -5738,7 +5738,7 @@
           <p:cNvPr id="3" name="closing-title">
             <a:extLst xmlns:a="http://schemas.openxmlformats.org/drawingml/2006/main">
               <a:ext uri="{FF2B5EF4-FFF2-40B4-BE49-F238E27FC236}">
-                <a16:creationId xmlns:a16="http://schemas.microsoft.com/office/drawing/2014/main" id="{D1306379-5170-4EB8-9357-3E963E1EE306}"/>
+                <a16:creationId xmlns:a16="http://schemas.microsoft.com/office/drawing/2014/main" id="{5413DDF8-AD53-4174-97EF-07E71690ED72}"/>
               </a:ext>
             </a:extLst>
           </p:cNvPr>
@@ -5788,7 +5788,7 @@
           <p:cNvPr id="4" name="closing-copy">
             <a:extLst xmlns:a="http://schemas.openxmlformats.org/drawingml/2006/main">
               <a:ext uri="{FF2B5EF4-FFF2-40B4-BE49-F238E27FC236}">
-                <a16:creationId xmlns:a16="http://schemas.microsoft.com/office/drawing/2014/main" id="{CED5447B-8AE4-46A8-AE86-AE5183CB1187}"/>
+                <a16:creationId xmlns:a16="http://schemas.microsoft.com/office/drawing/2014/main" id="{A09436DE-AD2C-4FF7-9D01-6B394E444888}"/>
               </a:ext>
             </a:extLst>
           </p:cNvPr>
@@ -5862,7 +5862,7 @@
                   <a:srgbClr val="E6F2EF"/>
                 </a:solidFill>
               </a:rPr>
-              <a:t>3. Continue Project Activity 7 and keep authentic evidence.</a:t>
+              <a:t>3. Continue the Stitch detective lab and keep authentic evidence.</a:t>
             </a:r>
           </a:p>
         </p:txBody>
@@ -5872,7 +5872,7 @@
           <p:cNvPr id="5" name="closing-boundary">
             <a:extLst xmlns:a="http://schemas.openxmlformats.org/drawingml/2006/main">
               <a:ext uri="{FF2B5EF4-FFF2-40B4-BE49-F238E27FC236}">
-                <a16:creationId xmlns:a16="http://schemas.microsoft.com/office/drawing/2014/main" id="{BCF6E1F5-80AC-40A0-AED4-248584DFC172}"/>
+                <a16:creationId xmlns:a16="http://schemas.microsoft.com/office/drawing/2014/main" id="{259A0385-7510-47D6-839B-0D5F5E972EC0}"/>
               </a:ext>
             </a:extLst>
           </p:cNvPr>
@@ -5920,7 +5920,7 @@
     </p:spTree>
     <p:extLst>
       <p:ext uri="{BB962C8B-B14F-4D97-AF65-F5344CB8AC3E}">
-        <p14:creationId xmlns:p14="http://schemas.microsoft.com/office/powerpoint/2010/main" val="1339150199"/>
+        <p14:creationId xmlns:p14="http://schemas.microsoft.com/office/powerpoint/2010/main" val="829348848"/>
       </p:ext>
     </p:extLst>
   </p:cSld>
